--- a/PassportSOL_Pitch_Judges_v1.pptx
+++ b/PassportSOL_Pitch_Judges_v1.pptx
@@ -3207,7 +3207,7 @@
                 </a:solidFill>
                 <a:latin typeface="Aptos"/>
               </a:rPr>
-              <a:t>PassportSOL turns Gitcoin trust plus public Solana activity into collectible stamps.</a:t>
+              <a:t>On-chain reputation with collectables.</a:t>
             </a:r>
           </a:p>
           <a:p>

--- a/PassportSOL_Pitch_Judges_v1.pptx
+++ b/PassportSOL_Pitch_Judges_v1.pptx
@@ -3207,7 +3207,7 @@
                 </a:solidFill>
                 <a:latin typeface="Aptos"/>
               </a:rPr>
-              <a:t>On-chain reputation with collectables.</a:t>
+              <a:t>On-chain reputation with collectibles.</a:t>
             </a:r>
           </a:p>
           <a:p>
